--- a/Prezentace/1. ročník/PGM_18_OOP_Uvod.pptx
+++ b/Prezentace/1. ročník/PGM_18_OOP_Uvod.pptx
@@ -647,7 +647,7 @@
           <a:p>
             <a:fld id="{7F301882-0F64-42CA-AF36-EB94F93D279E}" type="datetimeFigureOut">
               <a:rPr lang="cs-CZ" smtClean="0"/>
-              <a:t>25.05.2025</a:t>
+              <a:t>26.05.2025</a:t>
             </a:fld>
             <a:endParaRPr lang="cs-CZ"/>
           </a:p>
@@ -2360,7 +2360,7 @@
           <a:p>
             <a:fld id="{42A54C80-263E-416B-A8E0-580EDEADCBDC}" type="datetimeFigureOut">
               <a:rPr lang="en-US" smtClean="0"/>
-              <a:t>5/25/2025</a:t>
+              <a:t>5/26/2025</a:t>
             </a:fld>
             <a:endParaRPr lang="en-US" dirty="0"/>
           </a:p>
@@ -2773,7 +2773,7 @@
             <a:fld id="{B61BEF0D-F0BB-DE4B-95CE-6DB70DBA9567}" type="datetimeFigureOut">
               <a:rPr lang="en-US" smtClean="0"/>
               <a:pPr/>
-              <a:t>5/25/2025</a:t>
+              <a:t>5/26/2025</a:t>
             </a:fld>
             <a:endParaRPr lang="en-US" dirty="0"/>
           </a:p>
@@ -3401,7 +3401,7 @@
           <a:p>
             <a:fld id="{42A54C80-263E-416B-A8E0-580EDEADCBDC}" type="datetimeFigureOut">
               <a:rPr lang="en-US" smtClean="0"/>
-              <a:t>5/25/2025</a:t>
+              <a:t>5/26/2025</a:t>
             </a:fld>
             <a:endParaRPr lang="en-US" dirty="0"/>
           </a:p>
@@ -4473,7 +4473,7 @@
         <p:spPr>
           <a:xfrm>
             <a:off x="803520" y="3000375"/>
-            <a:ext cx="3860555" cy="2386013"/>
+            <a:ext cx="4433760" cy="2386013"/>
           </a:xfrm>
           <a:prstGeom prst="rect">
             <a:avLst/>
@@ -5008,7 +5008,7 @@
                 <a16:creationId xmlns:a16="http://schemas.microsoft.com/office/drawing/2014/main" id="{8394CA29-33A7-D832-FEB4-15E1DEC17D66}"/>
               </a:ext>
               <a:ext uri="{C183D7F6-B498-43B3-948B-1728B52AA6E4}">
-                <adec:decorative xmlns:adec="http://schemas.microsoft.com/office/drawing/2017/decorative" val="1"/>
+                <adec:decorative xmlns="" xmlns:adec="http://schemas.microsoft.com/office/drawing/2017/decorative" val="1"/>
               </a:ext>
             </a:extLst>
           </p:cNvPr>
@@ -5104,7 +5104,7 @@
                 <a16:creationId xmlns:a16="http://schemas.microsoft.com/office/drawing/2014/main" id="{C4EFF5C6-B767-8BEF-067F-DC6FADFB3C26}"/>
               </a:ext>
               <a:ext uri="{C183D7F6-B498-43B3-948B-1728B52AA6E4}">
-                <adec:decorative xmlns:adec="http://schemas.microsoft.com/office/drawing/2017/decorative" val="1"/>
+                <adec:decorative xmlns="" xmlns:adec="http://schemas.microsoft.com/office/drawing/2017/decorative" val="1"/>
               </a:ext>
             </a:extLst>
           </p:cNvPr>
@@ -5135,7 +5135,7 @@
                   <a16:creationId xmlns:a16="http://schemas.microsoft.com/office/drawing/2014/main" id="{FDE31ABD-8C07-CD1D-5BBA-81A44E2ACC46}"/>
                 </a:ext>
                 <a:ext uri="{C183D7F6-B498-43B3-948B-1728B52AA6E4}">
-                  <adec:decorative xmlns:adec="http://schemas.microsoft.com/office/drawing/2017/decorative" val="1"/>
+                  <adec:decorative xmlns="" xmlns:adec="http://schemas.microsoft.com/office/drawing/2017/decorative" val="1"/>
                 </a:ext>
               </a:extLst>
             </p:cNvPr>
@@ -5196,7 +5196,7 @@
                   <a16:creationId xmlns:a16="http://schemas.microsoft.com/office/drawing/2014/main" id="{019603F8-044F-8124-3D6F-406E6144E731}"/>
                 </a:ext>
                 <a:ext uri="{C183D7F6-B498-43B3-948B-1728B52AA6E4}">
-                  <adec:decorative xmlns:adec="http://schemas.microsoft.com/office/drawing/2017/decorative" val="1"/>
+                  <adec:decorative xmlns="" xmlns:adec="http://schemas.microsoft.com/office/drawing/2017/decorative" val="1"/>
                 </a:ext>
               </a:extLst>
             </p:cNvPr>
@@ -5258,7 +5258,7 @@
                 <a16:creationId xmlns:a16="http://schemas.microsoft.com/office/drawing/2014/main" id="{090797CC-2AF2-6391-F560-2E0650F0A589}"/>
               </a:ext>
               <a:ext uri="{C183D7F6-B498-43B3-948B-1728B52AA6E4}">
-                <adec:decorative xmlns:adec="http://schemas.microsoft.com/office/drawing/2017/decorative" val="1"/>
+                <adec:decorative xmlns="" xmlns:adec="http://schemas.microsoft.com/office/drawing/2017/decorative" val="1"/>
               </a:ext>
             </a:extLst>
           </p:cNvPr>
@@ -5389,7 +5389,21 @@
                 <a:ea typeface="+mn-lt"/>
                 <a:cs typeface="+mn-lt"/>
               </a:rPr>
-              <a:t>Veškeré atributy třídy jsou uvedeny z privátní viditelností – přímo z atributy tak může pracovat pouze třída, které atributy náleží</a:t>
+              <a:t>Veškeré atributy třídy jsou uvedeny z privátní viditelností – přímo </a:t>
+            </a:r>
+            <a:r>
+              <a:rPr lang="cs-CZ" sz="1700" dirty="0" smtClean="0">
+                <a:ea typeface="+mn-lt"/>
+                <a:cs typeface="+mn-lt"/>
+              </a:rPr>
+              <a:t>s </a:t>
+            </a:r>
+            <a:r>
+              <a:rPr lang="cs-CZ" sz="1700" dirty="0">
+                <a:ea typeface="+mn-lt"/>
+                <a:cs typeface="+mn-lt"/>
+              </a:rPr>
+              <a:t>atributy tak může pracovat pouze třída, které atributy náleží</a:t>
             </a:r>
             <a:endParaRPr lang="cs-CZ" dirty="0"/>
           </a:p>
@@ -5480,7 +5494,7 @@
                 <a16:creationId xmlns:a16="http://schemas.microsoft.com/office/drawing/2014/main" id="{3331E3E0-7C0F-6D55-E002-FC3084BCF0A7}"/>
               </a:ext>
               <a:ext uri="{C183D7F6-B498-43B3-948B-1728B52AA6E4}">
-                <adec:decorative xmlns:adec="http://schemas.microsoft.com/office/drawing/2017/decorative" val="1"/>
+                <adec:decorative xmlns="" xmlns:adec="http://schemas.microsoft.com/office/drawing/2017/decorative" val="1"/>
               </a:ext>
             </a:extLst>
           </p:cNvPr>
@@ -5576,7 +5590,7 @@
                 <a16:creationId xmlns:a16="http://schemas.microsoft.com/office/drawing/2014/main" id="{B197CBF8-014E-EFCF-47B9-C3E1FB059518}"/>
               </a:ext>
               <a:ext uri="{C183D7F6-B498-43B3-948B-1728B52AA6E4}">
-                <adec:decorative xmlns:adec="http://schemas.microsoft.com/office/drawing/2017/decorative" val="1"/>
+                <adec:decorative xmlns="" xmlns:adec="http://schemas.microsoft.com/office/drawing/2017/decorative" val="1"/>
               </a:ext>
             </a:extLst>
           </p:cNvPr>
@@ -5607,7 +5621,7 @@
                   <a16:creationId xmlns:a16="http://schemas.microsoft.com/office/drawing/2014/main" id="{85DF2F9C-FE47-37DF-8EFC-B208AD5D8A4F}"/>
                 </a:ext>
                 <a:ext uri="{C183D7F6-B498-43B3-948B-1728B52AA6E4}">
-                  <adec:decorative xmlns:adec="http://schemas.microsoft.com/office/drawing/2017/decorative" val="1"/>
+                  <adec:decorative xmlns="" xmlns:adec="http://schemas.microsoft.com/office/drawing/2017/decorative" val="1"/>
                 </a:ext>
               </a:extLst>
             </p:cNvPr>
@@ -5668,7 +5682,7 @@
                   <a16:creationId xmlns:a16="http://schemas.microsoft.com/office/drawing/2014/main" id="{9B31D457-A622-66D9-1A4C-9B2014C28EEB}"/>
                 </a:ext>
                 <a:ext uri="{C183D7F6-B498-43B3-948B-1728B52AA6E4}">
-                  <adec:decorative xmlns:adec="http://schemas.microsoft.com/office/drawing/2017/decorative" val="1"/>
+                  <adec:decorative xmlns="" xmlns:adec="http://schemas.microsoft.com/office/drawing/2017/decorative" val="1"/>
                 </a:ext>
               </a:extLst>
             </p:cNvPr>
@@ -5730,7 +5744,7 @@
                 <a16:creationId xmlns:a16="http://schemas.microsoft.com/office/drawing/2014/main" id="{B167A7FF-9672-6F53-E150-0443D9971AAF}"/>
               </a:ext>
               <a:ext uri="{C183D7F6-B498-43B3-948B-1728B52AA6E4}">
-                <adec:decorative xmlns:adec="http://schemas.microsoft.com/office/drawing/2017/decorative" val="1"/>
+                <adec:decorative xmlns="" xmlns:adec="http://schemas.microsoft.com/office/drawing/2017/decorative" val="1"/>
               </a:ext>
             </a:extLst>
           </p:cNvPr>
@@ -5930,7 +5944,7 @@
                 <a16:creationId xmlns:a16="http://schemas.microsoft.com/office/drawing/2014/main" id="{DBF61EA3-B236-439E-9C0B-340980D56BEE}"/>
               </a:ext>
               <a:ext uri="{C183D7F6-B498-43B3-948B-1728B52AA6E4}">
-                <adec:decorative xmlns:adec="http://schemas.microsoft.com/office/drawing/2017/decorative" val="1"/>
+                <adec:decorative xmlns="" xmlns:adec="http://schemas.microsoft.com/office/drawing/2017/decorative" val="1"/>
               </a:ext>
             </a:extLst>
           </p:cNvPr>
@@ -6026,7 +6040,7 @@
                 <a16:creationId xmlns:a16="http://schemas.microsoft.com/office/drawing/2014/main" id="{28FAF094-D087-493F-8DF9-A486C2D6BBAA}"/>
               </a:ext>
               <a:ext uri="{C183D7F6-B498-43B3-948B-1728B52AA6E4}">
-                <adec:decorative xmlns:adec="http://schemas.microsoft.com/office/drawing/2017/decorative" val="1"/>
+                <adec:decorative xmlns="" xmlns:adec="http://schemas.microsoft.com/office/drawing/2017/decorative" val="1"/>
               </a:ext>
             </a:extLst>
           </p:cNvPr>
@@ -6057,7 +6071,7 @@
                   <a16:creationId xmlns:a16="http://schemas.microsoft.com/office/drawing/2014/main" id="{8D7C88D8-5509-4514-925A-9CE148E5CBD6}"/>
                 </a:ext>
                 <a:ext uri="{C183D7F6-B498-43B3-948B-1728B52AA6E4}">
-                  <adec:decorative xmlns:adec="http://schemas.microsoft.com/office/drawing/2017/decorative" val="1"/>
+                  <adec:decorative xmlns="" xmlns:adec="http://schemas.microsoft.com/office/drawing/2017/decorative" val="1"/>
                 </a:ext>
               </a:extLst>
             </p:cNvPr>
@@ -6118,7 +6132,7 @@
                   <a16:creationId xmlns:a16="http://schemas.microsoft.com/office/drawing/2014/main" id="{7275593D-F75E-4426-AE3E-2CDEFD228D25}"/>
                 </a:ext>
                 <a:ext uri="{C183D7F6-B498-43B3-948B-1728B52AA6E4}">
-                  <adec:decorative xmlns:adec="http://schemas.microsoft.com/office/drawing/2017/decorative" val="1"/>
+                  <adec:decorative xmlns="" xmlns:adec="http://schemas.microsoft.com/office/drawing/2017/decorative" val="1"/>
                 </a:ext>
               </a:extLst>
             </p:cNvPr>
@@ -6180,7 +6194,7 @@
                 <a16:creationId xmlns:a16="http://schemas.microsoft.com/office/drawing/2014/main" id="{E659831F-0D9A-4C63-9EBB-8435B85A440F}"/>
               </a:ext>
               <a:ext uri="{C183D7F6-B498-43B3-948B-1728B52AA6E4}">
-                <adec:decorative xmlns:adec="http://schemas.microsoft.com/office/drawing/2017/decorative" val="1"/>
+                <adec:decorative xmlns="" xmlns:adec="http://schemas.microsoft.com/office/drawing/2017/decorative" val="1"/>
               </a:ext>
             </a:extLst>
           </p:cNvPr>
@@ -6291,11 +6305,18 @@
           </a:p>
           <a:p>
             <a:r>
-              <a:rPr lang="cs-CZ" sz="1700" dirty="0">
+              <a:rPr lang="cs-CZ" sz="1700" dirty="0" smtClean="0">
                 <a:ea typeface="+mn-lt"/>
                 <a:cs typeface="+mn-lt"/>
               </a:rPr>
-              <a:t>Zmíněné objekty spolu na příslušné úrovní interagují (komunikují)</a:t>
+              <a:t>Objekty me</a:t>
+            </a:r>
+            <a:r>
+              <a:rPr lang="cs-CZ" sz="1700" dirty="0" smtClean="0">
+                <a:ea typeface="+mn-lt"/>
+                <a:cs typeface="+mn-lt"/>
+              </a:rPr>
+              <a:t>zi sebou komunikují</a:t>
             </a:r>
             <a:endParaRPr lang="cs-CZ" dirty="0">
               <a:ea typeface="+mn-lt"/>
@@ -6367,6 +6388,13 @@
   <p:clrMapOvr>
     <a:masterClrMapping/>
   </p:clrMapOvr>
+  <p:timing>
+    <p:tnLst>
+      <p:par>
+        <p:cTn id="1" dur="indefinite" restart="never" nodeType="tmRoot"/>
+      </p:par>
+    </p:tnLst>
+  </p:timing>
 </p:sld>
 </file>
 
@@ -6409,7 +6437,7 @@
                 <a16:creationId xmlns:a16="http://schemas.microsoft.com/office/drawing/2014/main" id="{3527D1FA-5B2D-B970-413F-A1689FD8E86C}"/>
               </a:ext>
               <a:ext uri="{C183D7F6-B498-43B3-948B-1728B52AA6E4}">
-                <adec:decorative xmlns:adec="http://schemas.microsoft.com/office/drawing/2017/decorative" val="1"/>
+                <adec:decorative xmlns="" xmlns:adec="http://schemas.microsoft.com/office/drawing/2017/decorative" val="1"/>
               </a:ext>
             </a:extLst>
           </p:cNvPr>
@@ -6505,7 +6533,7 @@
                 <a16:creationId xmlns:a16="http://schemas.microsoft.com/office/drawing/2014/main" id="{A7F215FD-4410-C0AA-03C2-5305D3840B2C}"/>
               </a:ext>
               <a:ext uri="{C183D7F6-B498-43B3-948B-1728B52AA6E4}">
-                <adec:decorative xmlns:adec="http://schemas.microsoft.com/office/drawing/2017/decorative" val="1"/>
+                <adec:decorative xmlns="" xmlns:adec="http://schemas.microsoft.com/office/drawing/2017/decorative" val="1"/>
               </a:ext>
             </a:extLst>
           </p:cNvPr>
@@ -6536,7 +6564,7 @@
                   <a16:creationId xmlns:a16="http://schemas.microsoft.com/office/drawing/2014/main" id="{F4902EE1-D793-69B8-6E76-B8EC2142A582}"/>
                 </a:ext>
                 <a:ext uri="{C183D7F6-B498-43B3-948B-1728B52AA6E4}">
-                  <adec:decorative xmlns:adec="http://schemas.microsoft.com/office/drawing/2017/decorative" val="1"/>
+                  <adec:decorative xmlns="" xmlns:adec="http://schemas.microsoft.com/office/drawing/2017/decorative" val="1"/>
                 </a:ext>
               </a:extLst>
             </p:cNvPr>
@@ -6597,7 +6625,7 @@
                   <a16:creationId xmlns:a16="http://schemas.microsoft.com/office/drawing/2014/main" id="{73466F75-10B4-E2F1-2053-1D80158C6333}"/>
                 </a:ext>
                 <a:ext uri="{C183D7F6-B498-43B3-948B-1728B52AA6E4}">
-                  <adec:decorative xmlns:adec="http://schemas.microsoft.com/office/drawing/2017/decorative" val="1"/>
+                  <adec:decorative xmlns="" xmlns:adec="http://schemas.microsoft.com/office/drawing/2017/decorative" val="1"/>
                 </a:ext>
               </a:extLst>
             </p:cNvPr>
@@ -6659,7 +6687,7 @@
                 <a16:creationId xmlns:a16="http://schemas.microsoft.com/office/drawing/2014/main" id="{1B7AC4E8-44AC-DD61-130D-809CCD49E194}"/>
               </a:ext>
               <a:ext uri="{C183D7F6-B498-43B3-948B-1728B52AA6E4}">
-                <adec:decorative xmlns:adec="http://schemas.microsoft.com/office/drawing/2017/decorative" val="1"/>
+                <adec:decorative xmlns="" xmlns:adec="http://schemas.microsoft.com/office/drawing/2017/decorative" val="1"/>
               </a:ext>
             </a:extLst>
           </p:cNvPr>
@@ -6750,43 +6778,43 @@
           <a:lstStyle/>
           <a:p>
             <a:r>
-              <a:rPr lang="cs-CZ" sz="1700">
+              <a:rPr lang="cs-CZ" sz="1700" dirty="0">
                 <a:ea typeface="+mn-lt"/>
                 <a:cs typeface="+mn-lt"/>
               </a:rPr>
               <a:t>Modelování = vytváření abstrakce skutečného objektu</a:t>
             </a:r>
-            <a:endParaRPr lang="cs-CZ">
+            <a:endParaRPr lang="cs-CZ" dirty="0">
               <a:ea typeface="+mn-lt"/>
               <a:cs typeface="+mn-lt"/>
             </a:endParaRPr>
           </a:p>
           <a:p>
             <a:r>
-              <a:rPr lang="cs-CZ" sz="1700">
+              <a:rPr lang="cs-CZ" sz="1700" dirty="0">
                 <a:ea typeface="+mn-lt"/>
                 <a:cs typeface="+mn-lt"/>
               </a:rPr>
               <a:t>Principy modelování:</a:t>
             </a:r>
-            <a:endParaRPr lang="cs-CZ"/>
-          </a:p>
-          <a:p>
-            <a:r>
-              <a:rPr lang="cs-CZ" sz="1700" b="1">
+            <a:endParaRPr lang="cs-CZ" dirty="0"/>
+          </a:p>
+          <a:p>
+            <a:r>
+              <a:rPr lang="cs-CZ" sz="1700" b="1" dirty="0">
                 <a:ea typeface="+mn-lt"/>
                 <a:cs typeface="+mn-lt"/>
               </a:rPr>
               <a:t>Abstrakce </a:t>
             </a:r>
             <a:r>
-              <a:rPr lang="cs-CZ" sz="1700">
+              <a:rPr lang="cs-CZ" sz="1700" dirty="0">
                 <a:ea typeface="+mn-lt"/>
                 <a:cs typeface="+mn-lt"/>
               </a:rPr>
               <a:t>– umožnit identifikovat podobnosti potřebné v modelu a odstínit se od nedůležitých rozdílů</a:t>
             </a:r>
-            <a:endParaRPr lang="cs-CZ"/>
+            <a:endParaRPr lang="cs-CZ" dirty="0"/>
           </a:p>
           <a:p>
             <a:r>
@@ -6801,9 +6829,30 @@
                 <a:ea typeface="+mn-lt"/>
                 <a:cs typeface="+mn-lt"/>
               </a:rPr>
-              <a:t>– umožnit efektivní komunikaci během vývoje nejen v týmu, ale i se zákazníkem (přesné vyjadřování)</a:t>
-            </a:r>
-            <a:endParaRPr lang="cs-CZ">
+              <a:t>– umožnit efektivní komunikaci během vývoje nejen v týmu, ale i se zákazníkem </a:t>
+            </a:r>
+            <a:r>
+              <a:rPr lang="cs-CZ" sz="1700" dirty="0" smtClean="0">
+                <a:ea typeface="+mn-lt"/>
+                <a:cs typeface="+mn-lt"/>
+              </a:rPr>
+              <a:t>(</a:t>
+            </a:r>
+            <a:r>
+              <a:rPr lang="cs-CZ" sz="1700" dirty="0" smtClean="0">
+                <a:ea typeface="+mn-lt"/>
+                <a:cs typeface="+mn-lt"/>
+              </a:rPr>
+              <a:t>názvy proměnných, přesné typy dat</a:t>
+            </a:r>
+            <a:r>
+              <a:rPr lang="cs-CZ" sz="1700" dirty="0" smtClean="0">
+                <a:ea typeface="+mn-lt"/>
+                <a:cs typeface="+mn-lt"/>
+              </a:rPr>
+              <a:t>)</a:t>
+            </a:r>
+            <a:endParaRPr lang="cs-CZ" dirty="0">
               <a:ea typeface="+mn-lt"/>
               <a:cs typeface="+mn-lt"/>
             </a:endParaRPr>
@@ -6840,7 +6889,7 @@
               </a:rPr>
               <a:t>redundancím – modelování by mělo zamezit výskytu dvojího, vzájemně se vyvracejícímu tvrzení, případně duplicit</a:t>
             </a:r>
-            <a:endParaRPr lang="cs-CZ"/>
+            <a:endParaRPr lang="cs-CZ" dirty="0"/>
           </a:p>
         </p:txBody>
       </p:sp>
@@ -6854,6 +6903,13 @@
   <p:clrMapOvr>
     <a:masterClrMapping/>
   </p:clrMapOvr>
+  <p:timing>
+    <p:tnLst>
+      <p:par>
+        <p:cTn id="1" dur="indefinite" restart="never" nodeType="tmRoot"/>
+      </p:par>
+    </p:tnLst>
+  </p:timing>
 </p:sld>
 </file>
 
@@ -6896,7 +6952,7 @@
                 <a16:creationId xmlns:a16="http://schemas.microsoft.com/office/drawing/2014/main" id="{BA73AC22-2FAF-C167-0B65-C96F96E4851A}"/>
               </a:ext>
               <a:ext uri="{C183D7F6-B498-43B3-948B-1728B52AA6E4}">
-                <adec:decorative xmlns:adec="http://schemas.microsoft.com/office/drawing/2017/decorative" val="1"/>
+                <adec:decorative xmlns="" xmlns:adec="http://schemas.microsoft.com/office/drawing/2017/decorative" val="1"/>
               </a:ext>
             </a:extLst>
           </p:cNvPr>
@@ -6992,7 +7048,7 @@
                 <a16:creationId xmlns:a16="http://schemas.microsoft.com/office/drawing/2014/main" id="{99CF4A80-2F0F-0CB0-7856-55ED55086118}"/>
               </a:ext>
               <a:ext uri="{C183D7F6-B498-43B3-948B-1728B52AA6E4}">
-                <adec:decorative xmlns:adec="http://schemas.microsoft.com/office/drawing/2017/decorative" val="1"/>
+                <adec:decorative xmlns="" xmlns:adec="http://schemas.microsoft.com/office/drawing/2017/decorative" val="1"/>
               </a:ext>
             </a:extLst>
           </p:cNvPr>
@@ -7023,7 +7079,7 @@
                   <a16:creationId xmlns:a16="http://schemas.microsoft.com/office/drawing/2014/main" id="{3A184880-11C0-6C96-93BE-0F82E5FFF53E}"/>
                 </a:ext>
                 <a:ext uri="{C183D7F6-B498-43B3-948B-1728B52AA6E4}">
-                  <adec:decorative xmlns:adec="http://schemas.microsoft.com/office/drawing/2017/decorative" val="1"/>
+                  <adec:decorative xmlns="" xmlns:adec="http://schemas.microsoft.com/office/drawing/2017/decorative" val="1"/>
                 </a:ext>
               </a:extLst>
             </p:cNvPr>
@@ -7084,7 +7140,7 @@
                   <a16:creationId xmlns:a16="http://schemas.microsoft.com/office/drawing/2014/main" id="{B09705B0-848A-4ABE-7346-D908D02064DB}"/>
                 </a:ext>
                 <a:ext uri="{C183D7F6-B498-43B3-948B-1728B52AA6E4}">
-                  <adec:decorative xmlns:adec="http://schemas.microsoft.com/office/drawing/2017/decorative" val="1"/>
+                  <adec:decorative xmlns="" xmlns:adec="http://schemas.microsoft.com/office/drawing/2017/decorative" val="1"/>
                 </a:ext>
               </a:extLst>
             </p:cNvPr>
@@ -7146,7 +7202,7 @@
                 <a16:creationId xmlns:a16="http://schemas.microsoft.com/office/drawing/2014/main" id="{FE664155-3DD0-BEEB-651F-9BA9C1AA75EF}"/>
               </a:ext>
               <a:ext uri="{C183D7F6-B498-43B3-948B-1728B52AA6E4}">
-                <adec:decorative xmlns:adec="http://schemas.microsoft.com/office/drawing/2017/decorative" val="1"/>
+                <adec:decorative xmlns="" xmlns:adec="http://schemas.microsoft.com/office/drawing/2017/decorative" val="1"/>
               </a:ext>
             </a:extLst>
           </p:cNvPr>
@@ -7232,7 +7288,7 @@
         </p:spPr>
         <p:txBody>
           <a:bodyPr anchor="ctr">
-            <a:normAutofit fontScale="92500" lnSpcReduction="20000"/>
+            <a:normAutofit lnSpcReduction="10000"/>
           </a:bodyPr>
           <a:lstStyle/>
           <a:p>
@@ -7247,21 +7303,18 @@
           </a:p>
           <a:p>
             <a:r>
-              <a:rPr lang="cs-CZ" sz="1700">
+              <a:rPr lang="cs-CZ" sz="1700" dirty="0" smtClean="0">
                 <a:ea typeface="+mn-lt"/>
                 <a:cs typeface="+mn-lt"/>
               </a:rPr>
-              <a:t>V programování každý objekt ví v jakém stavu se nachází a na základě vnitřního mechanizmu ví, jak se má v konkrétních situacích zachovat</a:t>
-            </a:r>
-            <a:endParaRPr lang="cs-CZ"/>
-          </a:p>
-          <a:p>
+              <a:t>Každý </a:t>
+            </a:r>
             <a:r>
               <a:rPr lang="cs-CZ" sz="1700" dirty="0">
                 <a:ea typeface="+mn-lt"/>
                 <a:cs typeface="+mn-lt"/>
               </a:rPr>
-              <a:t>Každý objekt je jedinečný s vlastní identitou</a:t>
+              <a:t>objekt je jedinečný s vlastní identitou</a:t>
             </a:r>
             <a:endParaRPr lang="cs-CZ" dirty="0"/>
           </a:p>
@@ -7343,7 +7396,7 @@
               </a:rPr>
               <a:t>Objekt je instancí třídy</a:t>
             </a:r>
-            <a:endParaRPr lang="cs-CZ" b="1"/>
+            <a:endParaRPr lang="cs-CZ" b="1" dirty="0"/>
           </a:p>
         </p:txBody>
       </p:sp>
@@ -7399,7 +7452,7 @@
                 <a16:creationId xmlns:a16="http://schemas.microsoft.com/office/drawing/2014/main" id="{E17506E0-F8B9-4197-41E9-7782B812D990}"/>
               </a:ext>
               <a:ext uri="{C183D7F6-B498-43B3-948B-1728B52AA6E4}">
-                <adec:decorative xmlns:adec="http://schemas.microsoft.com/office/drawing/2017/decorative" val="1"/>
+                <adec:decorative xmlns="" xmlns:adec="http://schemas.microsoft.com/office/drawing/2017/decorative" val="1"/>
               </a:ext>
             </a:extLst>
           </p:cNvPr>
@@ -7495,7 +7548,7 @@
                 <a16:creationId xmlns:a16="http://schemas.microsoft.com/office/drawing/2014/main" id="{64DFF2E2-C10B-97E2-2080-21614FBE1C73}"/>
               </a:ext>
               <a:ext uri="{C183D7F6-B498-43B3-948B-1728B52AA6E4}">
-                <adec:decorative xmlns:adec="http://schemas.microsoft.com/office/drawing/2017/decorative" val="1"/>
+                <adec:decorative xmlns="" xmlns:adec="http://schemas.microsoft.com/office/drawing/2017/decorative" val="1"/>
               </a:ext>
             </a:extLst>
           </p:cNvPr>
@@ -7526,7 +7579,7 @@
                   <a16:creationId xmlns:a16="http://schemas.microsoft.com/office/drawing/2014/main" id="{FD4B6897-13EF-064B-0CFD-F230FDFA3599}"/>
                 </a:ext>
                 <a:ext uri="{C183D7F6-B498-43B3-948B-1728B52AA6E4}">
-                  <adec:decorative xmlns:adec="http://schemas.microsoft.com/office/drawing/2017/decorative" val="1"/>
+                  <adec:decorative xmlns="" xmlns:adec="http://schemas.microsoft.com/office/drawing/2017/decorative" val="1"/>
                 </a:ext>
               </a:extLst>
             </p:cNvPr>
@@ -7587,7 +7640,7 @@
                   <a16:creationId xmlns:a16="http://schemas.microsoft.com/office/drawing/2014/main" id="{653D75C3-C6E5-52D0-0D64-903B7658473A}"/>
                 </a:ext>
                 <a:ext uri="{C183D7F6-B498-43B3-948B-1728B52AA6E4}">
-                  <adec:decorative xmlns:adec="http://schemas.microsoft.com/office/drawing/2017/decorative" val="1"/>
+                  <adec:decorative xmlns="" xmlns:adec="http://schemas.microsoft.com/office/drawing/2017/decorative" val="1"/>
                 </a:ext>
               </a:extLst>
             </p:cNvPr>
@@ -7649,7 +7702,7 @@
                 <a16:creationId xmlns:a16="http://schemas.microsoft.com/office/drawing/2014/main" id="{B89F9F82-E694-B2FF-BE72-A0358B98DC36}"/>
               </a:ext>
               <a:ext uri="{C183D7F6-B498-43B3-948B-1728B52AA6E4}">
-                <adec:decorative xmlns:adec="http://schemas.microsoft.com/office/drawing/2017/decorative" val="1"/>
+                <adec:decorative xmlns="" xmlns:adec="http://schemas.microsoft.com/office/drawing/2017/decorative" val="1"/>
               </a:ext>
             </a:extLst>
           </p:cNvPr>
@@ -8150,7 +8203,7 @@
               <a:buFont typeface="Arial"/>
               <a:buChar char="•"/>
             </a:pPr>
-            <a:endParaRPr lang="cs-CZ"/>
+            <a:endParaRPr lang="cs-CZ" dirty="0"/>
           </a:p>
           <a:p>
             <a:pPr>
@@ -8170,40 +8223,28 @@
             </a:r>
           </a:p>
           <a:p>
-            <a:pPr marL="971550" lvl="1" indent="-285750">
-              <a:buFont typeface="Courier New,monospace"/>
-              <a:buChar char="o"/>
-            </a:pPr>
+            <a:pPr marL="1028700" lvl="1" indent="-342900"/>
             <a:r>
               <a:rPr lang="cs-CZ" dirty="0"/>
               <a:t>Jméno</a:t>
             </a:r>
           </a:p>
           <a:p>
-            <a:pPr marL="971550" lvl="1" indent="-285750">
-              <a:buFont typeface="Courier New,monospace"/>
-              <a:buChar char="o"/>
-            </a:pPr>
+            <a:pPr marL="1028700" lvl="1" indent="-342900"/>
             <a:r>
               <a:rPr lang="cs-CZ" dirty="0"/>
               <a:t>Výška</a:t>
             </a:r>
           </a:p>
           <a:p>
-            <a:pPr marL="971550" lvl="1" indent="-285750">
-              <a:buFont typeface="Courier New,monospace"/>
-              <a:buChar char="o"/>
-            </a:pPr>
+            <a:pPr marL="1028700" lvl="1" indent="-342900"/>
             <a:r>
               <a:rPr lang="cs-CZ" dirty="0"/>
               <a:t>Váha</a:t>
             </a:r>
           </a:p>
           <a:p>
-            <a:pPr marL="971550" lvl="1" indent="-285750">
-              <a:buFont typeface="Courier New,monospace"/>
-              <a:buChar char="o"/>
-            </a:pPr>
+            <a:pPr marL="1028700" lvl="1" indent="-342900"/>
             <a:r>
               <a:rPr lang="cs-CZ" dirty="0"/>
               <a:t>Barva</a:t>
@@ -8290,10 +8331,7 @@
             <a:endParaRPr lang="cs-CZ" dirty="0"/>
           </a:p>
           <a:p>
-            <a:pPr lvl="1">
-              <a:buFont typeface="Courier New" panose="020B0604020202020204" pitchFamily="34" charset="0"/>
-              <a:buChar char="o"/>
-            </a:pPr>
+            <a:pPr lvl="1"/>
             <a:r>
               <a:rPr lang="cs-CZ" dirty="0">
                 <a:ea typeface="+mn-lt"/>
@@ -8301,13 +8339,10 @@
               </a:rPr>
               <a:t>Čenda</a:t>
             </a:r>
-            <a:endParaRPr lang="cs-CZ"/>
-          </a:p>
-          <a:p>
-            <a:pPr lvl="1">
-              <a:buFont typeface="Courier New" panose="020B0604020202020204" pitchFamily="34" charset="0"/>
-              <a:buChar char="o"/>
-            </a:pPr>
+            <a:endParaRPr lang="cs-CZ" dirty="0"/>
+          </a:p>
+          <a:p>
+            <a:pPr lvl="1"/>
             <a:r>
               <a:rPr lang="cs-CZ" dirty="0">
                 <a:ea typeface="+mn-lt"/>
@@ -8315,13 +8350,10 @@
               </a:rPr>
               <a:t>30 cm</a:t>
             </a:r>
-            <a:endParaRPr lang="cs-CZ"/>
-          </a:p>
-          <a:p>
-            <a:pPr lvl="1">
-              <a:buFont typeface="Courier New" panose="020B0604020202020204" pitchFamily="34" charset="0"/>
-              <a:buChar char="o"/>
-            </a:pPr>
+            <a:endParaRPr lang="cs-CZ" dirty="0"/>
+          </a:p>
+          <a:p>
+            <a:pPr lvl="1"/>
             <a:r>
               <a:rPr lang="cs-CZ" dirty="0">
                 <a:ea typeface="+mn-lt"/>
@@ -8332,10 +8364,7 @@
             <a:endParaRPr lang="cs-CZ" dirty="0"/>
           </a:p>
           <a:p>
-            <a:pPr lvl="1">
-              <a:buFont typeface="Courier New" panose="020B0604020202020204" pitchFamily="34" charset="0"/>
-              <a:buChar char="o"/>
-            </a:pPr>
+            <a:pPr lvl="1"/>
             <a:r>
               <a:rPr lang="cs-CZ" dirty="0">
                 <a:ea typeface="+mn-lt"/>
@@ -8343,7 +8372,7 @@
               </a:rPr>
               <a:t>Hnědo bíla</a:t>
             </a:r>
-            <a:endParaRPr lang="cs-CZ"/>
+            <a:endParaRPr lang="cs-CZ" dirty="0"/>
           </a:p>
           <a:p>
             <a:endParaRPr lang="cs-CZ" dirty="0"/>
@@ -8420,6 +8449,13 @@
   <p:clrMapOvr>
     <a:masterClrMapping/>
   </p:clrMapOvr>
+  <p:timing>
+    <p:tnLst>
+      <p:par>
+        <p:cTn id="1" dur="indefinite" restart="never" nodeType="tmRoot"/>
+      </p:par>
+    </p:tnLst>
+  </p:timing>
 </p:sld>
 </file>
 
@@ -8462,7 +8498,7 @@
                 <a16:creationId xmlns:a16="http://schemas.microsoft.com/office/drawing/2014/main" id="{7C3F9B61-5CB2-D479-1626-D6EC4D032325}"/>
               </a:ext>
               <a:ext uri="{C183D7F6-B498-43B3-948B-1728B52AA6E4}">
-                <adec:decorative xmlns:adec="http://schemas.microsoft.com/office/drawing/2017/decorative" val="1"/>
+                <adec:decorative xmlns="" xmlns:adec="http://schemas.microsoft.com/office/drawing/2017/decorative" val="1"/>
               </a:ext>
             </a:extLst>
           </p:cNvPr>
@@ -8558,7 +8594,7 @@
                 <a16:creationId xmlns:a16="http://schemas.microsoft.com/office/drawing/2014/main" id="{38A99020-682A-8C0E-F3AF-340782189CE0}"/>
               </a:ext>
               <a:ext uri="{C183D7F6-B498-43B3-948B-1728B52AA6E4}">
-                <adec:decorative xmlns:adec="http://schemas.microsoft.com/office/drawing/2017/decorative" val="1"/>
+                <adec:decorative xmlns="" xmlns:adec="http://schemas.microsoft.com/office/drawing/2017/decorative" val="1"/>
               </a:ext>
             </a:extLst>
           </p:cNvPr>
@@ -8589,7 +8625,7 @@
                   <a16:creationId xmlns:a16="http://schemas.microsoft.com/office/drawing/2014/main" id="{18C25B6E-1A01-1146-E40C-85F734796961}"/>
                 </a:ext>
                 <a:ext uri="{C183D7F6-B498-43B3-948B-1728B52AA6E4}">
-                  <adec:decorative xmlns:adec="http://schemas.microsoft.com/office/drawing/2017/decorative" val="1"/>
+                  <adec:decorative xmlns="" xmlns:adec="http://schemas.microsoft.com/office/drawing/2017/decorative" val="1"/>
                 </a:ext>
               </a:extLst>
             </p:cNvPr>
@@ -8650,7 +8686,7 @@
                   <a16:creationId xmlns:a16="http://schemas.microsoft.com/office/drawing/2014/main" id="{848D3BBE-EB50-9AAD-BBFA-3D6A1530AA6F}"/>
                 </a:ext>
                 <a:ext uri="{C183D7F6-B498-43B3-948B-1728B52AA6E4}">
-                  <adec:decorative xmlns:adec="http://schemas.microsoft.com/office/drawing/2017/decorative" val="1"/>
+                  <adec:decorative xmlns="" xmlns:adec="http://schemas.microsoft.com/office/drawing/2017/decorative" val="1"/>
                 </a:ext>
               </a:extLst>
             </p:cNvPr>
@@ -8712,7 +8748,7 @@
                 <a16:creationId xmlns:a16="http://schemas.microsoft.com/office/drawing/2014/main" id="{9C246DA8-04F7-FF05-02C8-5F9DD14A76DD}"/>
               </a:ext>
               <a:ext uri="{C183D7F6-B498-43B3-948B-1728B52AA6E4}">
-                <adec:decorative xmlns:adec="http://schemas.microsoft.com/office/drawing/2017/decorative" val="1"/>
+                <adec:decorative xmlns="" xmlns:adec="http://schemas.microsoft.com/office/drawing/2017/decorative" val="1"/>
               </a:ext>
             </a:extLst>
           </p:cNvPr>
@@ -8961,7 +8997,7 @@
                 <a16:creationId xmlns:a16="http://schemas.microsoft.com/office/drawing/2014/main" id="{E975663F-F068-6CFD-BAE4-C0FC74C970F6}"/>
               </a:ext>
               <a:ext uri="{C183D7F6-B498-43B3-948B-1728B52AA6E4}">
-                <adec:decorative xmlns:adec="http://schemas.microsoft.com/office/drawing/2017/decorative" val="1"/>
+                <adec:decorative xmlns="" xmlns:adec="http://schemas.microsoft.com/office/drawing/2017/decorative" val="1"/>
               </a:ext>
             </a:extLst>
           </p:cNvPr>
@@ -9057,7 +9093,7 @@
                 <a16:creationId xmlns:a16="http://schemas.microsoft.com/office/drawing/2014/main" id="{4BC8C804-FDA3-5B12-9D0A-784D63C00668}"/>
               </a:ext>
               <a:ext uri="{C183D7F6-B498-43B3-948B-1728B52AA6E4}">
-                <adec:decorative xmlns:adec="http://schemas.microsoft.com/office/drawing/2017/decorative" val="1"/>
+                <adec:decorative xmlns="" xmlns:adec="http://schemas.microsoft.com/office/drawing/2017/decorative" val="1"/>
               </a:ext>
             </a:extLst>
           </p:cNvPr>
@@ -9088,7 +9124,7 @@
                   <a16:creationId xmlns:a16="http://schemas.microsoft.com/office/drawing/2014/main" id="{E008AAC7-742A-AE8F-2C63-2F9244F677C5}"/>
                 </a:ext>
                 <a:ext uri="{C183D7F6-B498-43B3-948B-1728B52AA6E4}">
-                  <adec:decorative xmlns:adec="http://schemas.microsoft.com/office/drawing/2017/decorative" val="1"/>
+                  <adec:decorative xmlns="" xmlns:adec="http://schemas.microsoft.com/office/drawing/2017/decorative" val="1"/>
                 </a:ext>
               </a:extLst>
             </p:cNvPr>
@@ -9149,7 +9185,7 @@
                   <a16:creationId xmlns:a16="http://schemas.microsoft.com/office/drawing/2014/main" id="{417B76CC-2D17-BF7E-CF97-823C59556258}"/>
                 </a:ext>
                 <a:ext uri="{C183D7F6-B498-43B3-948B-1728B52AA6E4}">
-                  <adec:decorative xmlns:adec="http://schemas.microsoft.com/office/drawing/2017/decorative" val="1"/>
+                  <adec:decorative xmlns="" xmlns:adec="http://schemas.microsoft.com/office/drawing/2017/decorative" val="1"/>
                 </a:ext>
               </a:extLst>
             </p:cNvPr>
@@ -9211,7 +9247,7 @@
                 <a16:creationId xmlns:a16="http://schemas.microsoft.com/office/drawing/2014/main" id="{FBFAA94D-B9EA-3CDC-C8EC-7E13A374AABB}"/>
               </a:ext>
               <a:ext uri="{C183D7F6-B498-43B3-948B-1728B52AA6E4}">
-                <adec:decorative xmlns:adec="http://schemas.microsoft.com/office/drawing/2017/decorative" val="1"/>
+                <adec:decorative xmlns="" xmlns:adec="http://schemas.microsoft.com/office/drawing/2017/decorative" val="1"/>
               </a:ext>
             </a:extLst>
           </p:cNvPr>
@@ -9386,18 +9422,18 @@
               <a:t>C# umožňuje některé metody nebo atributy označit jako neděditelné a </a:t>
             </a:r>
             <a:r>
-              <a:rPr lang="cs-CZ" sz="1700" dirty="0" err="1">
+              <a:rPr lang="cs-CZ" sz="1700" dirty="0" smtClean="0">
                 <a:ea typeface="+mn-lt"/>
                 <a:cs typeface="+mn-lt"/>
               </a:rPr>
-              <a:t>odovozené</a:t>
+              <a:t>odvozené </a:t>
             </a:r>
             <a:r>
               <a:rPr lang="cs-CZ" sz="1700" dirty="0">
                 <a:ea typeface="+mn-lt"/>
                 <a:cs typeface="+mn-lt"/>
               </a:rPr>
-              <a:t> třídy tak tyto části neobsahují</a:t>
+              <a:t>třídy tak tyto části neobsahují</a:t>
             </a:r>
             <a:endParaRPr lang="cs-CZ" dirty="0"/>
           </a:p>
@@ -9458,7 +9494,7 @@
                 <a16:creationId xmlns:a16="http://schemas.microsoft.com/office/drawing/2014/main" id="{5F91BED9-22CF-4F08-0BFC-1D63B61CAD8D}"/>
               </a:ext>
               <a:ext uri="{C183D7F6-B498-43B3-948B-1728B52AA6E4}">
-                <adec:decorative xmlns:adec="http://schemas.microsoft.com/office/drawing/2017/decorative" val="1"/>
+                <adec:decorative xmlns="" xmlns:adec="http://schemas.microsoft.com/office/drawing/2017/decorative" val="1"/>
               </a:ext>
             </a:extLst>
           </p:cNvPr>
@@ -9554,7 +9590,7 @@
                 <a16:creationId xmlns:a16="http://schemas.microsoft.com/office/drawing/2014/main" id="{463A0827-0042-BE77-9A17-42DCC61DB4E8}"/>
               </a:ext>
               <a:ext uri="{C183D7F6-B498-43B3-948B-1728B52AA6E4}">
-                <adec:decorative xmlns:adec="http://schemas.microsoft.com/office/drawing/2017/decorative" val="1"/>
+                <adec:decorative xmlns="" xmlns:adec="http://schemas.microsoft.com/office/drawing/2017/decorative" val="1"/>
               </a:ext>
             </a:extLst>
           </p:cNvPr>
@@ -9585,7 +9621,7 @@
                   <a16:creationId xmlns:a16="http://schemas.microsoft.com/office/drawing/2014/main" id="{0E5DBB2B-D21F-5A9F-B65D-5F6038A62897}"/>
                 </a:ext>
                 <a:ext uri="{C183D7F6-B498-43B3-948B-1728B52AA6E4}">
-                  <adec:decorative xmlns:adec="http://schemas.microsoft.com/office/drawing/2017/decorative" val="1"/>
+                  <adec:decorative xmlns="" xmlns:adec="http://schemas.microsoft.com/office/drawing/2017/decorative" val="1"/>
                 </a:ext>
               </a:extLst>
             </p:cNvPr>
@@ -9646,7 +9682,7 @@
                   <a16:creationId xmlns:a16="http://schemas.microsoft.com/office/drawing/2014/main" id="{7042ECB5-B544-E904-747A-2A0814B033D2}"/>
                 </a:ext>
                 <a:ext uri="{C183D7F6-B498-43B3-948B-1728B52AA6E4}">
-                  <adec:decorative xmlns:adec="http://schemas.microsoft.com/office/drawing/2017/decorative" val="1"/>
+                  <adec:decorative xmlns="" xmlns:adec="http://schemas.microsoft.com/office/drawing/2017/decorative" val="1"/>
                 </a:ext>
               </a:extLst>
             </p:cNvPr>
@@ -9708,7 +9744,7 @@
                 <a16:creationId xmlns:a16="http://schemas.microsoft.com/office/drawing/2014/main" id="{F2050AA8-7A97-282A-94B8-DA4ADB6D55E3}"/>
               </a:ext>
               <a:ext uri="{C183D7F6-B498-43B3-948B-1728B52AA6E4}">
-                <adec:decorative xmlns:adec="http://schemas.microsoft.com/office/drawing/2017/decorative" val="1"/>
+                <adec:decorative xmlns="" xmlns:adec="http://schemas.microsoft.com/office/drawing/2017/decorative" val="1"/>
               </a:ext>
             </a:extLst>
           </p:cNvPr>
@@ -9818,7 +9854,7 @@
               </a:rPr>
               <a:t>Odvozenými třídami z třídy člověk pak mohou být třídy, které jsou konkrétnější – student, zaměstnanec, učitel</a:t>
             </a:r>
-            <a:endParaRPr lang="cs-CZ"/>
+            <a:endParaRPr lang="cs-CZ" dirty="0"/>
           </a:p>
           <a:p>
             <a:r>
@@ -9828,7 +9864,7 @@
               </a:rPr>
               <a:t>Třída student je odvozena z třídy člověk – zdědí její atributy a přidáme ji vlastní atributy, třída, ročník, obor</a:t>
             </a:r>
-            <a:endParaRPr lang="cs-CZ"/>
+            <a:endParaRPr lang="cs-CZ" dirty="0"/>
           </a:p>
           <a:p>
             <a:r>
@@ -9838,7 +9874,7 @@
               </a:rPr>
               <a:t>Třída zaměstnanec je také odvozena z třídy člověk – zdědí atributy a přidáme vlastní atributy plat, pozice</a:t>
             </a:r>
-            <a:endParaRPr lang="cs-CZ"/>
+            <a:endParaRPr lang="cs-CZ" dirty="0"/>
           </a:p>
           <a:p>
             <a:r>
@@ -9848,38 +9884,32 @@
               </a:rPr>
               <a:t>Student, zaměstnanec jsou tedy třídy odvozené a třída člověk je pro třídy student a zaměstnanec super třídou</a:t>
             </a:r>
-            <a:endParaRPr lang="cs-CZ"/>
-          </a:p>
-          <a:p>
-            <a:r>
-              <a:rPr lang="cs-CZ" sz="1700" dirty="0">
+            <a:endParaRPr lang="cs-CZ" dirty="0"/>
+          </a:p>
+          <a:p>
+            <a:r>
+              <a:rPr lang="cs-CZ" sz="1800" dirty="0"/>
+              <a:t>Všechny třídy v C# dědí implicitně z </a:t>
+            </a:r>
+            <a:r>
+              <a:rPr lang="cs-CZ" sz="1800" dirty="0" smtClean="0"/>
+              <a:t>třídy </a:t>
+            </a:r>
+            <a:r>
+              <a:rPr lang="cs-CZ" sz="1700" b="1" dirty="0" err="1">
                 <a:ea typeface="+mn-lt"/>
                 <a:cs typeface="+mn-lt"/>
               </a:rPr>
-              <a:t>V C# je super třídou pro všechny ostatní odvozené třída </a:t>
-            </a:r>
-            <a:r>
-              <a:rPr lang="cs-CZ" sz="1700" err="1">
+              <a:t>o</a:t>
+            </a:r>
+            <a:r>
+              <a:rPr lang="cs-CZ" sz="1700" b="1" dirty="0" err="1" smtClean="0">
                 <a:ea typeface="+mn-lt"/>
                 <a:cs typeface="+mn-lt"/>
               </a:rPr>
-              <a:t>class</a:t>
-            </a:r>
-            <a:r>
-              <a:rPr lang="cs-CZ" sz="1700" dirty="0">
-                <a:ea typeface="+mn-lt"/>
-                <a:cs typeface="+mn-lt"/>
-              </a:rPr>
-              <a:t> </a:t>
-            </a:r>
-            <a:r>
-              <a:rPr lang="cs-CZ" sz="1700" b="1" err="1">
-                <a:ea typeface="+mn-lt"/>
-                <a:cs typeface="+mn-lt"/>
-              </a:rPr>
-              <a:t>Object</a:t>
-            </a:r>
-            <a:endParaRPr lang="cs-CZ" b="1" err="1"/>
+              <a:t>bject</a:t>
+            </a:r>
+            <a:endParaRPr lang="cs-CZ" b="1" dirty="0"/>
           </a:p>
           <a:p>
             <a:endParaRPr lang="cs-CZ" sz="1700" dirty="0"/>
@@ -10691,8 +10721,15 @@
 <file path=customXml/itemProps1.xml><?xml version="1.0" encoding="utf-8"?>
 <ds:datastoreItem xmlns:ds="http://schemas.openxmlformats.org/officeDocument/2006/customXml" ds:itemID="{A6248623-A1ED-4B84-A453-B300410C6BC6}">
   <ds:schemaRefs>
+    <ds:schemaRef ds:uri="http://schemas.openxmlformats.org/package/2006/metadata/core-properties"/>
+    <ds:schemaRef ds:uri="http://purl.org/dc/elements/1.1/"/>
+    <ds:schemaRef ds:uri="http://www.w3.org/XML/1998/namespace"/>
+    <ds:schemaRef ds:uri="http://schemas.microsoft.com/office/2006/documentManagement/types"/>
+    <ds:schemaRef ds:uri="http://purl.org/dc/terms/"/>
     <ds:schemaRef ds:uri="http://schemas.microsoft.com/office/2006/metadata/properties"/>
+    <ds:schemaRef ds:uri="c8cc7701-65b3-4efe-89ae-c871b5b7820b"/>
     <ds:schemaRef ds:uri="http://schemas.microsoft.com/office/infopath/2007/PartnerControls"/>
+    <ds:schemaRef ds:uri="http://purl.org/dc/dcmitype/"/>
   </ds:schemaRefs>
 </ds:datastoreItem>
 </file>
